--- a/workshop-voorstel-RAD_120min.pptx
+++ b/workshop-voorstel-RAD_120min.pptx
@@ -2776,7 +2776,7 @@
                 <a:ea typeface="General Sans" pitchFamily="34" charset="-122"/>
                 <a:cs typeface="General Sans" pitchFamily="34" charset="-120"/>
               </a:rPr>
-              <a:t>Data en codebook verkennen met de agent, de code controleren en kleine groepen en definities vastleggen.</a:t>
+              <a:t>Data en codebook verkennen met de agent, de uitkomsten controleren en kleine groepen en definities vastleggen.</a:t>
             </a:r>
             <a:endParaRPr lang="en-US" sz="1400" dirty="0"/>
           </a:p>
@@ -4021,7 +4021,7 @@
                 <a:ea typeface="General Sans" pitchFamily="34" charset="-122"/>
                 <a:cs typeface="General Sans" pitchFamily="34" charset="-120"/>
               </a:rPr>
-              <a:t>Skills werken via vaste tussenproducten (bijvoorbeeld data.csv en schets.md), zodat elke stap na te lopen is. Responsible-checks zitten in beide skills verweven. De skills zijn bestanden in de repo en kosten €0.</a:t>
+              <a:t>/workshop-verkennen en /workshop-dashboard, plus /workshop-reflectie voor de evaluatie. Deelnemers prompten zelf; de leider draait de skills live (gemeten: ongeveer 1 en 2 tot 2,5 minuut). Vaste tussenproducten, kosten €0.</a:t>
             </a:r>
             <a:endParaRPr lang="en-US" sz="1300" dirty="0"/>
           </a:p>
@@ -4514,7 +4514,7 @@
                 <a:ea typeface="General Sans" pitchFamily="34" charset="-122"/>
                 <a:cs typeface="General Sans" pitchFamily="34" charset="-120"/>
               </a:rPr>
-              <a:t>Drempel voor kleine aantallen (bijvoorbeeld n&lt;5) en herleidbare combinaties van uitsplitsingen.</a:t>
+              <a:t>Groepen onder 30 studenten en percentages onder 5 niet tonen, en herleidbare combinaties van uitsplitsingen.</a:t>
             </a:r>
             <a:endParaRPr lang="en-US" sz="1300" dirty="0"/>
           </a:p>
@@ -5445,7 +5445,7 @@
                 <a:ea typeface="General Sans" pitchFamily="34" charset="-122"/>
                 <a:cs typeface="General Sans" pitchFamily="34" charset="-120"/>
               </a:rPr>
-              <a:t>Kanttekening devcontainer: deelnemers werken alleen via de AI-agent. De devcontainer bevat Python, DuckDB en Streamlit, en de skills en checkpoints staan al klaar. De data is een synthetisch 1CHO-CSV met gelabelde waarden en codebook.</a:t>
+              <a:t>Kanttekening devcontainer: deelnemers werken alleen via de AI-agent, in de Codespaces-omgeving dair-agentic-coding (Claude via Foundry). Python en uv staan erin; DuckDB, Streamlit en Plotly nog niet (voorstel: issue #10). Welk model deelnemers krijgen is nog open (issue #11).</a:t>
             </a:r>
             <a:endParaRPr lang="en-US" sz="1400" dirty="0"/>
           </a:p>
@@ -6057,7 +6057,7 @@
                 <a:ea typeface="General Sans" pitchFamily="34" charset="-122"/>
                 <a:cs typeface="General Sans" pitchFamily="34" charset="-120"/>
               </a:rPr>
-              <a:t>Skills uitdelen kost tijd</a:t>
+              <a:t>De skill duurt langer dan gepland</a:t>
             </a:r>
             <a:endParaRPr lang="en-US" sz="1250" dirty="0"/>
           </a:p>
@@ -6096,7 +6096,7 @@
                 <a:ea typeface="General Sans" pitchFamily="34" charset="-122"/>
                 <a:cs typeface="General Sans" pitchFamily="34" charset="-120"/>
               </a:rPr>
-              <a:t>Skills staan klaar in de devcontainer en activeren met één commando (maximaal 1 minuut).</a:t>
+              <a:t>Gemeten: ongeveer 1 en 2 tot 2,5 minuut, met een ander model dan in de devcontainer. Opnieuw meten in de echte omgeving en ruim marge nemen.</a:t>
             </a:r>
             <a:endParaRPr lang="en-US" sz="1150" dirty="0"/>
           </a:p>
@@ -6462,7 +6462,7 @@
                 <a:ea typeface="General Sans" pitchFamily="34" charset="-122"/>
                 <a:cs typeface="General Sans" pitchFamily="34" charset="-120"/>
               </a:rPr>
-              <a:t>Vooraf controleren en zo nodig een patroon en enkele kleine groepen inbouwen, zodat er iets te vinden is én te blokkeren.</a:t>
+              <a:t>Patroon (sector) en kleine groepen zijn ingebouwd en vooraf gecontroleerd met een antwoordsleutel.</a:t>
             </a:r>
             <a:endParaRPr lang="en-US" sz="1150" dirty="0"/>
           </a:p>
@@ -6752,8 +6752,8 @@
         </p:nvSpPr>
         <p:spPr>
           <a:xfrm>
-            <a:off x="5852160" y="2103120"/>
-            <a:ext cx="5788152" cy="1234440"/>
+            <a:off x="5852160" y="2011680"/>
+            <a:ext cx="5788152" cy="1005840"/>
           </a:xfrm>
           <a:prstGeom prst="roundRect">
             <a:avLst>
@@ -6786,7 +6786,7 @@
         </p:nvSpPr>
         <p:spPr>
           <a:xfrm>
-            <a:off x="6126480" y="2304288"/>
+            <a:off x="6126480" y="2139696"/>
             <a:ext cx="1051560" cy="310896"/>
           </a:xfrm>
           <a:prstGeom prst="roundRect">
@@ -6820,7 +6820,7 @@
         </p:nvSpPr>
         <p:spPr>
           <a:xfrm>
-            <a:off x="6126480" y="2304288"/>
+            <a:off x="6126480" y="2139696"/>
             <a:ext cx="1051560" cy="310896"/>
           </a:xfrm>
           <a:prstGeom prst="rect">
@@ -6859,8 +6859,8 @@
         </p:nvSpPr>
         <p:spPr>
           <a:xfrm>
-            <a:off x="6126480" y="2706624"/>
-            <a:ext cx="5257800" cy="548640"/>
+            <a:off x="6126480" y="2487168"/>
+            <a:ext cx="5257800" cy="457200"/>
           </a:xfrm>
           <a:prstGeom prst="rect">
             <a:avLst/>
@@ -6884,7 +6884,445 @@
                 <a:ea typeface="General Sans" pitchFamily="34" charset="-122"/>
                 <a:cs typeface="General Sans" pitchFamily="34" charset="-120"/>
               </a:rPr>
-              <a:t>Nog open: kies A, B of C. Alle drie draaien op het 1CHO-inschrijvingenbestand.</a:t>
+              <a:t>Voorstel: casus A. Casus C vraagt het VO-eindcijfer, dat niet in het synthetische bestand zit.</a:t>
+            </a:r>
+            <a:endParaRPr lang="en-US" sz="1300" dirty="0"/>
+          </a:p>
+        </p:txBody>
+      </p:sp>
+      <p:sp>
+        <p:nvSpPr>
+          <p:cNvPr id="10" name="Shape 5"/>
+          <p:cNvSpPr/>
+          <p:nvPr/>
+        </p:nvSpPr>
+        <p:spPr>
+          <a:xfrm>
+            <a:off x="5852160" y="3108960"/>
+            <a:ext cx="5788152" cy="1005840"/>
+          </a:xfrm>
+          <a:prstGeom prst="roundRect">
+            <a:avLst>
+              <a:gd name="adj" fmla="val 20741"/>
+            </a:avLst>
+          </a:prstGeom>
+          <a:solidFill>
+            <a:srgbClr val="F4D9DC"/>
+          </a:solidFill>
+          <a:ln w="12700">
+            <a:solidFill>
+              <a:srgbClr val="F4D9DC"/>
+            </a:solidFill>
+            <a:prstDash val="solid"/>
+          </a:ln>
+        </p:spPr>
+        <p:txBody>
+          <a:bodyPr/>
+          <a:lstStyle/>
+          <a:p>
+            <a:endParaRPr lang="en-NL"/>
+          </a:p>
+        </p:txBody>
+      </p:sp>
+      <p:sp>
+        <p:nvSpPr>
+          <p:cNvPr id="11" name="Shape 6"/>
+          <p:cNvSpPr/>
+          <p:nvPr/>
+        </p:nvSpPr>
+        <p:spPr>
+          <a:xfrm>
+            <a:off x="6126480" y="3236976"/>
+            <a:ext cx="1051560" cy="310896"/>
+          </a:xfrm>
+          <a:prstGeom prst="roundRect">
+            <a:avLst>
+              <a:gd name="adj" fmla="val 50000"/>
+            </a:avLst>
+          </a:prstGeom>
+          <a:solidFill>
+            <a:srgbClr val="3D68EC"/>
+          </a:solidFill>
+          <a:ln w="12700">
+            <a:solidFill>
+              <a:srgbClr val="3D68EC"/>
+            </a:solidFill>
+            <a:prstDash val="solid"/>
+          </a:ln>
+        </p:spPr>
+        <p:txBody>
+          <a:bodyPr/>
+          <a:lstStyle/>
+          <a:p>
+            <a:endParaRPr lang="en-NL"/>
+          </a:p>
+        </p:txBody>
+      </p:sp>
+      <p:sp>
+        <p:nvSpPr>
+          <p:cNvPr id="12" name="Text 7"/>
+          <p:cNvSpPr txBox="1"/>
+          <p:nvPr/>
+        </p:nvSpPr>
+        <p:spPr>
+          <a:xfrm>
+            <a:off x="6126480" y="3236976"/>
+            <a:ext cx="1051560" cy="310896"/>
+          </a:xfrm>
+          <a:prstGeom prst="rect">
+            <a:avLst/>
+          </a:prstGeom>
+          <a:noFill/>
+          <a:ln/>
+        </p:spPr>
+        <p:txBody>
+          <a:bodyPr wrap="square" lIns="0" tIns="0" rIns="0" bIns="0" rtlCol="0" anchor="ctr"/>
+          <a:lstStyle/>
+          <a:p>
+            <a:pPr marL="0" indent="0" algn="ctr">
+              <a:buNone/>
+            </a:pPr>
+            <a:r>
+              <a:rPr lang="en-US" sz="1200" b="1" dirty="0">
+                <a:solidFill>
+                  <a:srgbClr val="F4D9DC"/>
+                </a:solidFill>
+                <a:latin typeface="General Sans" pitchFamily="34" charset="0"/>
+                <a:ea typeface="General Sans" pitchFamily="34" charset="-122"/>
+                <a:cs typeface="General Sans" pitchFamily="34" charset="-120"/>
+              </a:rPr>
+              <a:t>Omgeving</a:t>
+            </a:r>
+            <a:endParaRPr lang="en-US" sz="1200" dirty="0"/>
+          </a:p>
+        </p:txBody>
+      </p:sp>
+      <p:sp>
+        <p:nvSpPr>
+          <p:cNvPr id="13" name="Text 8"/>
+          <p:cNvSpPr txBox="1"/>
+          <p:nvPr/>
+        </p:nvSpPr>
+        <p:spPr>
+          <a:xfrm>
+            <a:off x="6126480" y="3584448"/>
+            <a:ext cx="5257800" cy="457200"/>
+          </a:xfrm>
+          <a:prstGeom prst="rect">
+            <a:avLst/>
+          </a:prstGeom>
+          <a:noFill/>
+          <a:ln/>
+        </p:spPr>
+        <p:txBody>
+          <a:bodyPr wrap="square" lIns="0" tIns="0" rIns="0" bIns="0" rtlCol="0" anchor="t"/>
+          <a:lstStyle/>
+          <a:p>
+            <a:pPr marL="0" indent="0">
+              <a:buNone/>
+            </a:pPr>
+            <a:r>
+              <a:rPr lang="en-US" sz="1300" dirty="0">
+                <a:solidFill>
+                  <a:srgbClr val="000000"/>
+                </a:solidFill>
+                <a:latin typeface="General Sans" pitchFamily="34" charset="0"/>
+                <a:ea typeface="General Sans" pitchFamily="34" charset="-122"/>
+                <a:cs typeface="General Sans" pitchFamily="34" charset="-120"/>
+              </a:rPr>
+              <a:t>Pakketten in het image (issue #10) en welk Claude-model deelnemers krijgen (issue #11), bij Tomer.</a:t>
+            </a:r>
+            <a:endParaRPr lang="en-US" sz="1300" dirty="0"/>
+          </a:p>
+        </p:txBody>
+      </p:sp>
+      <p:sp>
+        <p:nvSpPr>
+          <p:cNvPr id="10" name="Shape 5"/>
+          <p:cNvSpPr/>
+          <p:nvPr/>
+        </p:nvSpPr>
+        <p:spPr>
+          <a:xfrm>
+            <a:off x="5852160" y="4206240"/>
+            <a:ext cx="5788152" cy="1005840"/>
+          </a:xfrm>
+          <a:prstGeom prst="roundRect">
+            <a:avLst>
+              <a:gd name="adj" fmla="val 20741"/>
+            </a:avLst>
+          </a:prstGeom>
+          <a:solidFill>
+            <a:srgbClr val="F4D9DC"/>
+          </a:solidFill>
+          <a:ln w="12700">
+            <a:solidFill>
+              <a:srgbClr val="F4D9DC"/>
+            </a:solidFill>
+            <a:prstDash val="solid"/>
+          </a:ln>
+        </p:spPr>
+        <p:txBody>
+          <a:bodyPr/>
+          <a:lstStyle/>
+          <a:p>
+            <a:endParaRPr lang="en-NL"/>
+          </a:p>
+        </p:txBody>
+      </p:sp>
+      <p:sp>
+        <p:nvSpPr>
+          <p:cNvPr id="11" name="Shape 6"/>
+          <p:cNvSpPr/>
+          <p:nvPr/>
+        </p:nvSpPr>
+        <p:spPr>
+          <a:xfrm>
+            <a:off x="6126480" y="4334255"/>
+            <a:ext cx="1051560" cy="310896"/>
+          </a:xfrm>
+          <a:prstGeom prst="roundRect">
+            <a:avLst>
+              <a:gd name="adj" fmla="val 50000"/>
+            </a:avLst>
+          </a:prstGeom>
+          <a:solidFill>
+            <a:srgbClr val="3D68EC"/>
+          </a:solidFill>
+          <a:ln w="12700">
+            <a:solidFill>
+              <a:srgbClr val="3D68EC"/>
+            </a:solidFill>
+            <a:prstDash val="solid"/>
+          </a:ln>
+        </p:spPr>
+        <p:txBody>
+          <a:bodyPr/>
+          <a:lstStyle/>
+          <a:p>
+            <a:endParaRPr lang="en-NL"/>
+          </a:p>
+        </p:txBody>
+      </p:sp>
+      <p:sp>
+        <p:nvSpPr>
+          <p:cNvPr id="12" name="Text 7"/>
+          <p:cNvSpPr txBox="1"/>
+          <p:nvPr/>
+        </p:nvSpPr>
+        <p:spPr>
+          <a:xfrm>
+            <a:off x="6126480" y="4334255"/>
+            <a:ext cx="1051560" cy="310896"/>
+          </a:xfrm>
+          <a:prstGeom prst="rect">
+            <a:avLst/>
+          </a:prstGeom>
+          <a:noFill/>
+          <a:ln/>
+        </p:spPr>
+        <p:txBody>
+          <a:bodyPr wrap="square" lIns="0" tIns="0" rIns="0" bIns="0" rtlCol="0" anchor="ctr"/>
+          <a:lstStyle/>
+          <a:p>
+            <a:pPr marL="0" indent="0" algn="ctr">
+              <a:buNone/>
+            </a:pPr>
+            <a:r>
+              <a:rPr lang="en-US" sz="1200" b="1" dirty="0">
+                <a:solidFill>
+                  <a:srgbClr val="F4D9DC"/>
+                </a:solidFill>
+                <a:latin typeface="General Sans" pitchFamily="34" charset="0"/>
+                <a:ea typeface="General Sans" pitchFamily="34" charset="-122"/>
+                <a:cs typeface="General Sans" pitchFamily="34" charset="-120"/>
+              </a:rPr>
+              <a:t>Skills</a:t>
+            </a:r>
+            <a:endParaRPr lang="en-US" sz="1200" dirty="0"/>
+          </a:p>
+        </p:txBody>
+      </p:sp>
+      <p:sp>
+        <p:nvSpPr>
+          <p:cNvPr id="13" name="Text 8"/>
+          <p:cNvSpPr txBox="1"/>
+          <p:nvPr/>
+        </p:nvSpPr>
+        <p:spPr>
+          <a:xfrm>
+            <a:off x="6126480" y="4681727"/>
+            <a:ext cx="5257800" cy="457200"/>
+          </a:xfrm>
+          <a:prstGeom prst="rect">
+            <a:avLst/>
+          </a:prstGeom>
+          <a:noFill/>
+          <a:ln/>
+        </p:spPr>
+        <p:txBody>
+          <a:bodyPr wrap="square" lIns="0" tIns="0" rIns="0" bIns="0" rtlCol="0" anchor="t"/>
+          <a:lstStyle/>
+          <a:p>
+            <a:pPr marL="0" indent="0">
+              <a:buNone/>
+            </a:pPr>
+            <a:r>
+              <a:rPr lang="en-US" sz="1300" dirty="0">
+                <a:solidFill>
+                  <a:srgbClr val="000000"/>
+                </a:solidFill>
+                <a:latin typeface="General Sans" pitchFamily="34" charset="0"/>
+                <a:ea typeface="General Sans" pitchFamily="34" charset="-122"/>
+                <a:cs typeface="General Sans" pitchFamily="34" charset="-120"/>
+              </a:rPr>
+              <a:t>De skills staan in een pull request (#9) en moeten nog gereviewd worden. De data volgt apart.</a:t>
+            </a:r>
+            <a:endParaRPr lang="en-US" sz="1300" dirty="0"/>
+          </a:p>
+        </p:txBody>
+      </p:sp>
+      <p:sp>
+        <p:nvSpPr>
+          <p:cNvPr id="10" name="Shape 5"/>
+          <p:cNvSpPr/>
+          <p:nvPr/>
+        </p:nvSpPr>
+        <p:spPr>
+          <a:xfrm>
+            <a:off x="5852160" y="5303520"/>
+            <a:ext cx="5788152" cy="1005840"/>
+          </a:xfrm>
+          <a:prstGeom prst="roundRect">
+            <a:avLst>
+              <a:gd name="adj" fmla="val 20741"/>
+            </a:avLst>
+          </a:prstGeom>
+          <a:solidFill>
+            <a:srgbClr val="F4D9DC"/>
+          </a:solidFill>
+          <a:ln w="12700">
+            <a:solidFill>
+              <a:srgbClr val="F4D9DC"/>
+            </a:solidFill>
+            <a:prstDash val="solid"/>
+          </a:ln>
+        </p:spPr>
+        <p:txBody>
+          <a:bodyPr/>
+          <a:lstStyle/>
+          <a:p>
+            <a:endParaRPr lang="en-NL"/>
+          </a:p>
+        </p:txBody>
+      </p:sp>
+      <p:sp>
+        <p:nvSpPr>
+          <p:cNvPr id="11" name="Shape 6"/>
+          <p:cNvSpPr/>
+          <p:nvPr/>
+        </p:nvSpPr>
+        <p:spPr>
+          <a:xfrm>
+            <a:off x="6126480" y="5431536"/>
+            <a:ext cx="1051560" cy="310896"/>
+          </a:xfrm>
+          <a:prstGeom prst="roundRect">
+            <a:avLst>
+              <a:gd name="adj" fmla="val 50000"/>
+            </a:avLst>
+          </a:prstGeom>
+          <a:solidFill>
+            <a:srgbClr val="3D68EC"/>
+          </a:solidFill>
+          <a:ln w="12700">
+            <a:solidFill>
+              <a:srgbClr val="3D68EC"/>
+            </a:solidFill>
+            <a:prstDash val="solid"/>
+          </a:ln>
+        </p:spPr>
+        <p:txBody>
+          <a:bodyPr/>
+          <a:lstStyle/>
+          <a:p>
+            <a:endParaRPr lang="en-NL"/>
+          </a:p>
+        </p:txBody>
+      </p:sp>
+      <p:sp>
+        <p:nvSpPr>
+          <p:cNvPr id="12" name="Text 7"/>
+          <p:cNvSpPr txBox="1"/>
+          <p:nvPr/>
+        </p:nvSpPr>
+        <p:spPr>
+          <a:xfrm>
+            <a:off x="6126480" y="5431536"/>
+            <a:ext cx="1051560" cy="310896"/>
+          </a:xfrm>
+          <a:prstGeom prst="rect">
+            <a:avLst/>
+          </a:prstGeom>
+          <a:noFill/>
+          <a:ln/>
+        </p:spPr>
+        <p:txBody>
+          <a:bodyPr wrap="square" lIns="0" tIns="0" rIns="0" bIns="0" rtlCol="0" anchor="ctr"/>
+          <a:lstStyle/>
+          <a:p>
+            <a:pPr marL="0" indent="0" algn="ctr">
+              <a:buNone/>
+            </a:pPr>
+            <a:r>
+              <a:rPr lang="en-US" sz="1200" b="1" dirty="0">
+                <a:solidFill>
+                  <a:srgbClr val="F4D9DC"/>
+                </a:solidFill>
+                <a:latin typeface="General Sans" pitchFamily="34" charset="0"/>
+                <a:ea typeface="General Sans" pitchFamily="34" charset="-122"/>
+                <a:cs typeface="General Sans" pitchFamily="34" charset="-120"/>
+              </a:rPr>
+              <a:t>Planning</a:t>
+            </a:r>
+            <a:endParaRPr lang="en-US" sz="1200" dirty="0"/>
+          </a:p>
+        </p:txBody>
+      </p:sp>
+      <p:sp>
+        <p:nvSpPr>
+          <p:cNvPr id="13" name="Text 8"/>
+          <p:cNvSpPr txBox="1"/>
+          <p:nvPr/>
+        </p:nvSpPr>
+        <p:spPr>
+          <a:xfrm>
+            <a:off x="6126480" y="5779008"/>
+            <a:ext cx="5257800" cy="457200"/>
+          </a:xfrm>
+          <a:prstGeom prst="rect">
+            <a:avLst/>
+          </a:prstGeom>
+          <a:noFill/>
+          <a:ln/>
+        </p:spPr>
+        <p:txBody>
+          <a:bodyPr wrap="square" lIns="0" tIns="0" rIns="0" bIns="0" rtlCol="0" anchor="t"/>
+          <a:lstStyle/>
+          <a:p>
+            <a:pPr marL="0" indent="0">
+              <a:buNone/>
+            </a:pPr>
+            <a:r>
+              <a:rPr lang="en-US" sz="1300" dirty="0">
+                <a:solidFill>
+                  <a:srgbClr val="000000"/>
+                </a:solidFill>
+                <a:latin typeface="General Sans" pitchFamily="34" charset="0"/>
+                <a:ea typeface="General Sans" pitchFamily="34" charset="-122"/>
+                <a:cs typeface="General Sans" pitchFamily="34" charset="-120"/>
+              </a:rPr>
+              <a:t>Peiling-tool, datum en spreker invullen en de skills opnieuw meten in de echte omgeving.</a:t>
             </a:r>
             <a:endParaRPr lang="en-US" sz="1300" dirty="0"/>
           </a:p>
@@ -14745,7 +15183,7 @@
                 <a:ea typeface="General Sans" pitchFamily="34" charset="-122"/>
                 <a:cs typeface="General Sans" pitchFamily="34" charset="-120"/>
               </a:rPr>
-              <a:t>Eén stuurt de agent aan, de ander controleert code en uitkomst. Wissel per ronde.</a:t>
+              <a:t>Eén typt de opdrachten, de ander checkt of het antwoord klopt. Wissel per ronde.</a:t>
             </a:r>
             <a:endParaRPr lang="en-US" sz="1400" dirty="0"/>
           </a:p>
@@ -15736,7 +16174,7 @@
                 <a:ea typeface="General Sans" pitchFamily="34" charset="-122"/>
                 <a:cs typeface="General Sans" pitchFamily="34" charset="-120"/>
               </a:rPr>
-              <a:t>AI-TAAK</a:t>
+              <a:t>MET DE AGENT</a:t>
             </a:r>
             <a:endParaRPr lang="en-US" sz="1100" dirty="0"/>
           </a:p>
@@ -16148,7 +16586,7 @@
                 <a:ea typeface="General Sans" pitchFamily="34" charset="-122"/>
                 <a:cs typeface="General Sans" pitchFamily="34" charset="-120"/>
               </a:rPr>
-              <a:t>AI-TAAK</a:t>
+              <a:t>MET DE AGENT</a:t>
             </a:r>
             <a:endParaRPr lang="en-US" sz="1100" dirty="0"/>
           </a:p>
@@ -16560,7 +16998,7 @@
                 <a:ea typeface="General Sans" pitchFamily="34" charset="-122"/>
                 <a:cs typeface="General Sans" pitchFamily="34" charset="-120"/>
               </a:rPr>
-              <a:t>AI-TAAK</a:t>
+              <a:t>MET DE AGENT</a:t>
             </a:r>
             <a:endParaRPr lang="en-US" sz="1100" dirty="0"/>
           </a:p>
@@ -16688,7 +17126,7 @@
                 <a:ea typeface="General Sans" pitchFamily="34" charset="-122"/>
                 <a:cs typeface="General Sans" pitchFamily="34" charset="-120"/>
               </a:rPr>
-              <a:t>Alle drie draaien op het 1CHO-bestand (output van de 1cijferho-tool). Definities van uitval, rendement en studiewissel volgen het package staat1cho.</a:t>
+              <a:t>Voorstel: casus A. Casus C vraagt het VO-eindcijfer, dat niet in het synthetische inschrijvingenbestand zit (dat komt uit VAKHAVW). Definities volgen het package staat1cho.</a:t>
             </a:r>
             <a:endParaRPr lang="en-US" sz="1100" dirty="0"/>
           </a:p>
@@ -16997,7 +17435,7 @@
                 <a:ea typeface="General Sans" pitchFamily="34" charset="-122"/>
                 <a:cs typeface="General Sans" pitchFamily="34" charset="-120"/>
               </a:rPr>
-              <a:t>losse vraag</a:t>
+              <a:t>losse opdracht</a:t>
             </a:r>
             <a:endParaRPr lang="en-US" sz="1400" dirty="0"/>
           </a:p>
@@ -17036,7 +17474,7 @@
                 <a:ea typeface="General Sans" pitchFamily="34" charset="-122"/>
                 <a:cs typeface="General Sans" pitchFamily="34" charset="-120"/>
               </a:rPr>
-              <a:t>Je typt wat je wilt. Dat werkt, maar het resultaat is elke keer anders en de kennis zit alleen in jouw hoofd.</a:t>
+              <a:t>Wat jij zelf typt. Het resultaat is elke keer anders en hangt af van hoe je het vraagt.</a:t>
             </a:r>
             <a:endParaRPr lang="en-US" sz="1300" dirty="0"/>
           </a:p>
@@ -17322,7 +17760,7 @@
                 <a:ea typeface="General Sans" pitchFamily="34" charset="-122"/>
                 <a:cs typeface="General Sans" pitchFamily="34" charset="-120"/>
               </a:rPr>
-              <a:t>vastgelegd recept</a:t>
+              <a:t>vast stappenplan</a:t>
             </a:r>
             <a:endParaRPr lang="en-US" sz="1400" dirty="0"/>
           </a:p>
@@ -17361,7 +17799,7 @@
                 <a:ea typeface="General Sans" pitchFamily="34" charset="-122"/>
                 <a:cs typeface="General Sans" pitchFamily="34" charset="-120"/>
               </a:rPr>
-              <a:t>Een map met een SKILL.md: instructies, voorbeelden, scripts en checks. De agent pakt hem erbij zodra de taak erom vraagt.</a:t>
+              <a:t>Een tekstbestand (SKILL.md) met stappen en checks dat de agent volgt. Elke keer dezelfde werkwijze.</a:t>
             </a:r>
             <a:endParaRPr lang="en-US" sz="1300" dirty="0"/>
           </a:p>
@@ -17585,7 +18023,7 @@
                 <a:ea typeface="General Sans" pitchFamily="34" charset="-122"/>
                 <a:cs typeface="General Sans" pitchFamily="34" charset="-120"/>
               </a:rPr>
-              <a:t>voert uit</a:t>
+              <a:t>de uitvoerder</a:t>
             </a:r>
             <a:endParaRPr lang="en-US" sz="1400" dirty="0"/>
           </a:p>
@@ -17624,7 +18062,7 @@
                 <a:ea typeface="General Sans" pitchFamily="34" charset="-122"/>
                 <a:cs typeface="General Sans" pitchFamily="34" charset="-120"/>
               </a:rPr>
-              <a:t>Claude Code leest de skill, schrijft en draait de code en toetst het resultaat aan de checks uit de skill.</a:t>
+              <a:t>De AI die het werk doet: leest je opdracht of de skill, schrijft en draait de code. Wij gebruiken Claude Code.</a:t>
             </a:r>
             <a:endParaRPr lang="en-US" sz="1300" dirty="0"/>
           </a:p>
@@ -18256,7 +18694,7 @@
                 <a:ea typeface="General Sans" pitchFamily="34" charset="-122"/>
                 <a:cs typeface="General Sans" pitchFamily="34" charset="-120"/>
               </a:rPr>
-              <a:t>n&lt;5</a:t>
+              <a:t>n&lt;30</a:t>
             </a:r>
             <a:endParaRPr lang="en-US" sz="6400" dirty="0"/>
           </a:p>
@@ -19858,7 +20296,7 @@
                 <a:ea typeface="General Sans" pitchFamily="34" charset="-122"/>
                 <a:cs typeface="General Sans" pitchFamily="34" charset="-120"/>
               </a:rPr>
-              <a:t>Skills en checkpoints</a:t>
+              <a:t>Skills</a:t>
             </a:r>
             <a:endParaRPr lang="en-US" sz="1400" dirty="0"/>
           </a:p>
@@ -19897,7 +20335,7 @@
                 <a:ea typeface="General Sans" pitchFamily="34" charset="-122"/>
                 <a:cs typeface="General Sans" pitchFamily="34" charset="-120"/>
               </a:rPr>
-              <a:t>staan klaar, activeren met één commando</a:t>
+              <a:t>de leider laat ze live zien bij de spiegelmomenten</a:t>
             </a:r>
             <a:endParaRPr lang="en-US" sz="1100" dirty="0"/>
           </a:p>

--- a/workshop-voorstel-RAD_120min.pptx
+++ b/workshop-voorstel-RAD_120min.pptx
@@ -842,7 +842,7 @@
           <a:lstStyle/>
           <a:p>
             <a:r>
-              <a:t>Evaluatie en afsluiting (16 min, één blok). Vraag eerst toestemming: de antwoorden zijn anoniem en dienen om te bepalen of er een vervolg komt. Terugblik (4 min) via de reflectie-skill of de peiling; meerkeuzevraag (2 min); open vraag (4 min); daarna de afsluiting (6 min). Formulering: workshop-rad/skills/workshop-reflectie/references/vragenset.md.</a:t>
+              <a:t>Evaluatie en afsluiting (16 min, één blok). Vraag eerst toestemming: de antwoorden zijn anoniem en dienen om te bepalen of er een vervolg komt. Terugblik (4 min) via de peiling of een kort rondje; meerkeuzevraag (2 min); open vraag (4 min); daarna de afsluiting (6 min). Formulering: workshop-rad/docs/evaluatievragen.md.</a:t>
             </a:r>
           </a:p>
         </p:txBody>
@@ -4021,7 +4021,7 @@
                 <a:ea typeface="General Sans" pitchFamily="34" charset="-122"/>
                 <a:cs typeface="General Sans" pitchFamily="34" charset="-120"/>
               </a:rPr>
-              <a:t>/workshop-verkennen en /workshop-dashboard, plus /workshop-reflectie voor de evaluatie. Deelnemers prompten zelf; de leider draait de skills live (gemeten: ongeveer 1 en 2 tot 2,5 minuut). Vaste tussenproducten, kosten €0.</a:t>
+              <a:t>/workshop-verkennen en /workshop-dashboard. Deelnemers prompten zelf; de leider draait de skills live (gemeten: ongeveer 1 en 2 tot 2,5 minuut). Vaste tussenproducten, kosten €0.</a:t>
             </a:r>
             <a:endParaRPr lang="en-US" sz="1300" dirty="0"/>
           </a:p>
@@ -7706,7 +7706,7 @@
                 <a:ea typeface="General Sans" pitchFamily="34" charset="-122"/>
                 <a:cs typeface="General Sans" pitchFamily="34" charset="-120"/>
               </a:rPr>
-              <a:t>Wat ging goed, wat zag je nu pas, wat neem je mee? Via de reflectie-skill of de peiling.</a:t>
+              <a:t>Wat ging goed, wat zag je nu pas, wat neem je mee? Via de peiling of een kort rondje.</a:t>
             </a:r>
             <a:endParaRPr lang="en-US" sz="1400" dirty="0"/>
           </a:p>
